--- a/Template_Slides_NeuralMind_AI.pptx
+++ b/Template_Slides_NeuralMind_AI.pptx
@@ -5407,7 +5407,7 @@
                 </a:solidFill>
                 <a:latin typeface="NeuralMind Sans Square"/>
               </a:rPr>
-              <a:t>Julgamento humano</a:t>
+              <a:t>Decisão humana</a:t>
             </a:r>
           </a:p>
         </p:txBody>

--- a/Template_Slides_NeuralMind_AI.pptx
+++ b/Template_Slides_NeuralMind_AI.pptx
@@ -4686,7 +4686,7 @@
         <p:spPr>
           <a:xfrm>
             <a:off x="960120" y="4279392"/>
-            <a:ext cx="4800600" cy="680953"/>
+            <a:ext cx="4800600" cy="453045"/>
           </a:xfrm>
           <a:prstGeom prst="rect">
             <a:avLst/>
@@ -4770,7 +4770,7 @@
                 </a:solidFill>
                 <a:latin typeface="NeuralMind Sans Square"/>
               </a:rPr>
-              <a:t>IA responsável para setores críticos.</a:t>
+              <a:t>Inteligência para decisão.</a:t>
             </a:r>
           </a:p>
         </p:txBody>
@@ -5803,7 +5803,7 @@
         <p:spPr>
           <a:xfrm>
             <a:off x="11109960" y="6236208"/>
-            <a:ext cx="658368" cy="311923"/>
+            <a:ext cx="658368" cy="274663"/>
           </a:xfrm>
           <a:prstGeom prst="rect">
             <a:avLst/>
@@ -6033,7 +6033,7 @@
         <p:spPr>
           <a:xfrm>
             <a:off x="777240" y="5687568"/>
-            <a:ext cx="2834640" cy="402087"/>
+            <a:ext cx="2834640" cy="267512"/>
           </a:xfrm>
           <a:prstGeom prst="rect">
             <a:avLst/>
@@ -6883,7 +6883,7 @@
         <p:spPr>
           <a:xfrm>
             <a:off x="11109960" y="6236208"/>
-            <a:ext cx="658368" cy="311923"/>
+            <a:ext cx="658368" cy="274663"/>
           </a:xfrm>
           <a:prstGeom prst="rect">
             <a:avLst/>
@@ -7920,7 +7920,7 @@
         <p:spPr>
           <a:xfrm>
             <a:off x="11109960" y="6236208"/>
-            <a:ext cx="658368" cy="311923"/>
+            <a:ext cx="658368" cy="274663"/>
           </a:xfrm>
           <a:prstGeom prst="rect">
             <a:avLst/>
@@ -10123,7 +10123,7 @@
         <p:spPr>
           <a:xfrm>
             <a:off x="11109960" y="6236208"/>
-            <a:ext cx="658368" cy="311923"/>
+            <a:ext cx="658368" cy="274663"/>
           </a:xfrm>
           <a:prstGeom prst="rect">
             <a:avLst/>
@@ -10287,7 +10287,7 @@
         <p:spPr>
           <a:xfrm>
             <a:off x="11109960" y="6236208"/>
-            <a:ext cx="658368" cy="311923"/>
+            <a:ext cx="658368" cy="274663"/>
           </a:xfrm>
           <a:prstGeom prst="rect">
             <a:avLst/>
@@ -10814,7 +10814,7 @@
         <p:spPr>
           <a:xfrm>
             <a:off x="11109960" y="6236208"/>
-            <a:ext cx="658368" cy="311923"/>
+            <a:ext cx="658368" cy="274663"/>
           </a:xfrm>
           <a:prstGeom prst="rect">
             <a:avLst/>
@@ -11021,7 +11021,7 @@
         <p:spPr>
           <a:xfrm>
             <a:off x="11109960" y="6236208"/>
-            <a:ext cx="658368" cy="311923"/>
+            <a:ext cx="658368" cy="274663"/>
           </a:xfrm>
           <a:prstGeom prst="rect">
             <a:avLst/>
@@ -11875,7 +11875,7 @@
         <p:spPr>
           <a:xfrm>
             <a:off x="11109960" y="6236208"/>
-            <a:ext cx="658368" cy="311923"/>
+            <a:ext cx="658368" cy="274663"/>
           </a:xfrm>
           <a:prstGeom prst="rect">
             <a:avLst/>
@@ -12039,7 +12039,7 @@
         <p:spPr>
           <a:xfrm>
             <a:off x="868680" y="5138928"/>
-            <a:ext cx="2880360" cy="408572"/>
+            <a:ext cx="2880360" cy="271827"/>
           </a:xfrm>
           <a:prstGeom prst="rect">
             <a:avLst/>

--- a/Template_Slides_NeuralMind_AI.pptx
+++ b/Template_Slides_NeuralMind_AI.pptx
@@ -4662,7 +4662,7 @@
                 <a:solidFill>
                   <a:srgbClr val="9381FF"/>
                 </a:solidFill>
-                <a:latin typeface="NeuralMind Sans Square"/>
+                <a:latin typeface="Outfit"/>
               </a:rPr>
               <a:t>BRAND GUIDE DIGITAL</a:t>
             </a:r>
@@ -4686,7 +4686,7 @@
         <p:spPr>
           <a:xfrm>
             <a:off x="960120" y="4279392"/>
-            <a:ext cx="4800600" cy="453045"/>
+            <a:ext cx="4800600" cy="1031227"/>
           </a:xfrm>
           <a:prstGeom prst="rect">
             <a:avLst/>
@@ -4768,7 +4768,7 @@
                 <a:solidFill>
                   <a:srgbClr val="FFFFFC"/>
                 </a:solidFill>
-                <a:latin typeface="NeuralMind Sans Square"/>
+                <a:latin typeface="Outfit"/>
               </a:rPr>
               <a:t>Inteligência para decisão.</a:t>
             </a:r>
@@ -4978,7 +4978,7 @@
                 <a:solidFill>
                   <a:srgbClr val="F2766B"/>
                 </a:solidFill>
-                <a:latin typeface="NeuralMind Sans Square"/>
+                <a:latin typeface="Outfit"/>
               </a:rPr>
               <a:t>PESSOAS</a:t>
             </a:r>
@@ -5017,7 +5017,7 @@
                 <a:solidFill>
                   <a:srgbClr val="FFFFFC"/>
                 </a:solidFill>
-                <a:latin typeface="NeuralMind Sans Square"/>
+                <a:latin typeface="Outfit"/>
               </a:rPr>
               <a:t>A IA é poderosa.
 As pessoas,
@@ -5058,7 +5058,7 @@
                 <a:solidFill>
                   <a:srgbClr val="FFFFFC"/>
                 </a:solidFill>
-                <a:latin typeface="NeuralMind Sans Square"/>
+                <a:latin typeface="Outfit"/>
               </a:rPr>
               <a:t>Construímos modelos para apoiar especialistas — não para substituí-los. A última palavra é, e segue sendo, humana.</a:t>
             </a:r>
@@ -5158,7 +5158,7 @@
                 <a:solidFill>
                   <a:srgbClr val="290241"/>
                 </a:solidFill>
-                <a:latin typeface="NeuralMind Sans Square"/>
+                <a:latin typeface="Outfit"/>
               </a:rPr>
               <a:t>QUEM SOMOS</a:t>
             </a:r>
@@ -5197,7 +5197,7 @@
                 <a:solidFill>
                   <a:srgbClr val="290241"/>
                 </a:solidFill>
-                <a:latin typeface="NeuralMind Sans Square"/>
+                <a:latin typeface="Outfit"/>
               </a:rPr>
               <a:t>Ciência aplicada.
 Responsabilidade real.</a:t>
@@ -5237,7 +5237,7 @@
                 <a:solidFill>
                   <a:srgbClr val="6A6570"/>
                 </a:solidFill>
-                <a:latin typeface="NeuralMind Sans Square"/>
+                <a:latin typeface="Outfit"/>
               </a:rPr>
               <a:t>Fundada por Patricia Magalhães e Roberto Lotufo, a NeuralMind transforma pesquisa em IA responsável, auditável e confiável para organizações que lidam com alta complexidade e decisões críticas.</a:t>
             </a:r>
@@ -5321,7 +5321,7 @@
                 <a:solidFill>
                   <a:srgbClr val="290241"/>
                 </a:solidFill>
-                <a:latin typeface="NeuralMind Sans Square"/>
+                <a:latin typeface="Outfit"/>
               </a:rPr>
               <a:t>Rigor científico</a:t>
             </a:r>
@@ -5405,7 +5405,7 @@
                 <a:solidFill>
                   <a:srgbClr val="290241"/>
                 </a:solidFill>
-                <a:latin typeface="NeuralMind Sans Square"/>
+                <a:latin typeface="Outfit"/>
               </a:rPr>
               <a:t>Decisão humana</a:t>
             </a:r>
@@ -5489,7 +5489,7 @@
                 <a:solidFill>
                   <a:srgbClr val="290241"/>
                 </a:solidFill>
-                <a:latin typeface="NeuralMind Sans Square"/>
+                <a:latin typeface="Outfit"/>
               </a:rPr>
               <a:t>Setores regulados</a:t>
             </a:r>
@@ -5595,7 +5595,7 @@
                 <a:solidFill>
                   <a:srgbClr val="FFFFFC"/>
                 </a:solidFill>
-                <a:latin typeface="NeuralMind Sans Square"/>
+                <a:latin typeface="Outfit"/>
               </a:rPr>
               <a:t>Patricia Magalhães</a:t>
             </a:r>
@@ -5634,7 +5634,7 @@
                 <a:solidFill>
                   <a:srgbClr val="9381FF"/>
                 </a:solidFill>
-                <a:latin typeface="NeuralMind Sans Square"/>
+                <a:latin typeface="Outfit"/>
               </a:rPr>
               <a:t>Co-fundadora &amp; CEO</a:t>
             </a:r>
@@ -5740,7 +5740,7 @@
                 <a:solidFill>
                   <a:srgbClr val="FFFFFC"/>
                 </a:solidFill>
-                <a:latin typeface="NeuralMind Sans Square"/>
+                <a:latin typeface="Outfit"/>
               </a:rPr>
               <a:t>Roberto Lotufo</a:t>
             </a:r>
@@ -5779,7 +5779,7 @@
                 <a:solidFill>
                   <a:srgbClr val="9381FF"/>
                 </a:solidFill>
-                <a:latin typeface="NeuralMind Sans Square"/>
+                <a:latin typeface="Outfit"/>
               </a:rPr>
               <a:t>Co-fundador &amp; CTO</a:t>
             </a:r>
@@ -5803,7 +5803,7 @@
         <p:spPr>
           <a:xfrm>
             <a:off x="11109960" y="6236208"/>
-            <a:ext cx="658368" cy="274663"/>
+            <a:ext cx="658368" cy="504374"/>
           </a:xfrm>
           <a:prstGeom prst="rect">
             <a:avLst/>
@@ -5970,7 +5970,7 @@
                 <a:solidFill>
                   <a:srgbClr val="F2766B"/>
                 </a:solidFill>
-                <a:latin typeface="NeuralMind Sans Square"/>
+                <a:latin typeface="Outfit"/>
               </a:rPr>
               <a:t>PRÓXIMO PASSO</a:t>
             </a:r>
@@ -6009,7 +6009,7 @@
                 <a:solidFill>
                   <a:srgbClr val="FFFFFC"/>
                 </a:solidFill>
-                <a:latin typeface="NeuralMind Sans Square"/>
+                <a:latin typeface="Outfit"/>
               </a:rPr>
               <a:t>Vamos construir juntos.</a:t>
             </a:r>
@@ -6033,7 +6033,7 @@
         <p:spPr>
           <a:xfrm>
             <a:off x="777240" y="5687568"/>
-            <a:ext cx="2834640" cy="267512"/>
+            <a:ext cx="2834640" cy="608915"/>
           </a:xfrm>
           <a:prstGeom prst="rect">
             <a:avLst/>
@@ -6072,7 +6072,7 @@
                 <a:solidFill>
                   <a:srgbClr val="9381FF"/>
                 </a:solidFill>
-                <a:latin typeface="NeuralMind Sans Square"/>
+                <a:latin typeface="Outfit"/>
               </a:rPr>
               <a:t>COMERCIAL</a:t>
             </a:r>
@@ -6111,7 +6111,7 @@
                 <a:solidFill>
                   <a:srgbClr val="FFFFFC"/>
                 </a:solidFill>
-                <a:latin typeface="NeuralMind Sans Square"/>
+                <a:latin typeface="Outfit"/>
               </a:rPr>
               <a:t>contato@neuralmind.ai</a:t>
             </a:r>
@@ -6150,7 +6150,7 @@
                 <a:solidFill>
                   <a:srgbClr val="9381FF"/>
                 </a:solidFill>
-                <a:latin typeface="NeuralMind Sans Square"/>
+                <a:latin typeface="Outfit"/>
               </a:rPr>
               <a:t>WEB</a:t>
             </a:r>
@@ -6189,7 +6189,7 @@
                 <a:solidFill>
                   <a:srgbClr val="FFFFFC"/>
                 </a:solidFill>
-                <a:latin typeface="NeuralMind Sans Square"/>
+                <a:latin typeface="Outfit"/>
               </a:rPr>
               <a:t>neuralmind.ai</a:t>
             </a:r>
@@ -6289,7 +6289,7 @@
                 <a:solidFill>
                   <a:srgbClr val="290241"/>
                 </a:solidFill>
-                <a:latin typeface="NeuralMind Sans Square"/>
+                <a:latin typeface="Outfit"/>
               </a:rPr>
               <a:t>PROCESSO EM 3 ETAPAS</a:t>
             </a:r>
@@ -6328,7 +6328,7 @@
                 <a:solidFill>
                   <a:srgbClr val="290241"/>
                 </a:solidFill>
-                <a:latin typeface="NeuralMind Sans Square"/>
+                <a:latin typeface="Outfit"/>
               </a:rPr>
               <a:t>Da complexidade à decisão assistida.</a:t>
             </a:r>
@@ -6367,7 +6367,7 @@
                 <a:solidFill>
                   <a:srgbClr val="6A6570"/>
                 </a:solidFill>
-                <a:latin typeface="NeuralMind Sans Square"/>
+                <a:latin typeface="Outfit"/>
               </a:rPr>
               <a:t>Modelo para explicar jornadas curtas, pipelines comerciais, onboarding ou etapas de implantação.</a:t>
             </a:r>
@@ -6453,7 +6453,7 @@
                 <a:solidFill>
                   <a:srgbClr val="F2766B"/>
                 </a:solidFill>
-                <a:latin typeface="NeuralMind Sans Square"/>
+                <a:latin typeface="Outfit"/>
               </a:rPr>
               <a:t>01</a:t>
             </a:r>
@@ -6492,7 +6492,7 @@
                 <a:solidFill>
                   <a:srgbClr val="290241"/>
                 </a:solidFill>
-                <a:latin typeface="NeuralMind Sans Square"/>
+                <a:latin typeface="Outfit"/>
               </a:rPr>
               <a:t>Mapear</a:t>
             </a:r>
@@ -6531,7 +6531,7 @@
                 <a:solidFill>
                   <a:srgbClr val="6A6570"/>
                 </a:solidFill>
-                <a:latin typeface="NeuralMind Sans Square"/>
+                <a:latin typeface="Outfit"/>
               </a:rPr>
               <a:t>Identificamos fontes, regras de negócio, usuários e pontos de decisão que exigem rastreabilidade.</a:t>
             </a:r>
@@ -6617,7 +6617,7 @@
                 <a:solidFill>
                   <a:srgbClr val="F2766B"/>
                 </a:solidFill>
-                <a:latin typeface="NeuralMind Sans Square"/>
+                <a:latin typeface="Outfit"/>
               </a:rPr>
               <a:t>02</a:t>
             </a:r>
@@ -6656,7 +6656,7 @@
                 <a:solidFill>
                   <a:srgbClr val="290241"/>
                 </a:solidFill>
-                <a:latin typeface="NeuralMind Sans Square"/>
+                <a:latin typeface="Outfit"/>
               </a:rPr>
               <a:t>Construir</a:t>
             </a:r>
@@ -6695,7 +6695,7 @@
                 <a:solidFill>
                   <a:srgbClr val="6A6570"/>
                 </a:solidFill>
-                <a:latin typeface="NeuralMind Sans Square"/>
+                <a:latin typeface="Outfit"/>
               </a:rPr>
               <a:t>Combinamos modelos especializados, busca semântica e agentes para criar uma solução sob medida.</a:t>
             </a:r>
@@ -6781,7 +6781,7 @@
                 <a:solidFill>
                   <a:srgbClr val="F2766B"/>
                 </a:solidFill>
-                <a:latin typeface="NeuralMind Sans Square"/>
+                <a:latin typeface="Outfit"/>
               </a:rPr>
               <a:t>03</a:t>
             </a:r>
@@ -6820,7 +6820,7 @@
                 <a:solidFill>
                   <a:srgbClr val="290241"/>
                 </a:solidFill>
-                <a:latin typeface="NeuralMind Sans Square"/>
+                <a:latin typeface="Outfit"/>
               </a:rPr>
               <a:t>Validar</a:t>
             </a:r>
@@ -6859,7 +6859,7 @@
                 <a:solidFill>
                   <a:srgbClr val="6A6570"/>
                 </a:solidFill>
-                <a:latin typeface="NeuralMind Sans Square"/>
+                <a:latin typeface="Outfit"/>
               </a:rPr>
               <a:t>Especialistas revisam saídas, monitoram qualidade e transformam IA em operação confiável.</a:t>
             </a:r>
@@ -6883,7 +6883,7 @@
         <p:spPr>
           <a:xfrm>
             <a:off x="11109960" y="6236208"/>
-            <a:ext cx="658368" cy="274663"/>
+            <a:ext cx="658368" cy="504374"/>
           </a:xfrm>
           <a:prstGeom prst="rect">
             <a:avLst/>
@@ -6983,7 +6983,7 @@
                 <a:solidFill>
                   <a:srgbClr val="F2766B"/>
                 </a:solidFill>
-                <a:latin typeface="NeuralMind Sans Square"/>
+                <a:latin typeface="Outfit"/>
               </a:rPr>
               <a:t>ARQUITETURA DE PRODUTO</a:t>
             </a:r>
@@ -7022,7 +7022,7 @@
                 <a:solidFill>
                   <a:srgbClr val="FFFFFC"/>
                 </a:solidFill>
-                <a:latin typeface="NeuralMind Sans Square"/>
+                <a:latin typeface="Outfit"/>
               </a:rPr>
               <a:t>ARACI</a:t>
             </a:r>
@@ -7061,7 +7061,7 @@
                 <a:solidFill>
                   <a:srgbClr val="9381FF"/>
                 </a:solidFill>
-                <a:latin typeface="NeuralMind Sans Square"/>
+                <a:latin typeface="Outfit"/>
               </a:rPr>
               <a:t>Copiloto jurídico powered by NeuralSearchX + Jurema.</a:t>
             </a:r>
@@ -7147,7 +7147,7 @@
                 <a:solidFill>
                   <a:srgbClr val="9381FF"/>
                 </a:solidFill>
-                <a:latin typeface="NeuralMind Sans Square"/>
+                <a:latin typeface="Outfit"/>
               </a:rPr>
               <a:t>PRODUTO PRINCIPAL</a:t>
             </a:r>
@@ -7186,7 +7186,7 @@
                 <a:solidFill>
                   <a:srgbClr val="FFFFFC"/>
                 </a:solidFill>
-                <a:latin typeface="NeuralMind Sans Square"/>
+                <a:latin typeface="Outfit"/>
               </a:rPr>
               <a:t>ARACI</a:t>
             </a:r>
@@ -7225,7 +7225,7 @@
                 <a:solidFill>
                   <a:srgbClr val="FFFFFC"/>
                 </a:solidFill>
-                <a:latin typeface="NeuralMind Sans Square"/>
+                <a:latin typeface="Outfit"/>
               </a:rPr>
               <a:t>Análise, fundamentos e minutas com rastreabilidade para o trabalho jurídico.</a:t>
             </a:r>
@@ -7311,7 +7311,7 @@
                 <a:solidFill>
                   <a:srgbClr val="9381FF"/>
                 </a:solidFill>
-                <a:latin typeface="NeuralMind Sans Square"/>
+                <a:latin typeface="Outfit"/>
               </a:rPr>
               <a:t>BUSCA PROPRIETÁRIA</a:t>
             </a:r>
@@ -7350,7 +7350,7 @@
                 <a:solidFill>
                   <a:srgbClr val="FFFFFC"/>
                 </a:solidFill>
-                <a:latin typeface="NeuralMind Sans Square"/>
+                <a:latin typeface="Outfit"/>
               </a:rPr>
               <a:t>NeuralSearchX</a:t>
             </a:r>
@@ -7389,7 +7389,7 @@
                 <a:solidFill>
                   <a:srgbClr val="FFFFFC"/>
                 </a:solidFill>
-                <a:latin typeface="NeuralMind Sans Square"/>
+                <a:latin typeface="Outfit"/>
               </a:rPr>
               <a:t>Recupera evidências, documentos e fontes verificáveis para cada resposta.</a:t>
             </a:r>
@@ -7475,7 +7475,7 @@
                 <a:solidFill>
                   <a:srgbClr val="9381FF"/>
                 </a:solidFill>
-                <a:latin typeface="NeuralMind Sans Square"/>
+                <a:latin typeface="Outfit"/>
               </a:rPr>
               <a:t>MODELO ESPECIALIZADO</a:t>
             </a:r>
@@ -7514,7 +7514,7 @@
                 <a:solidFill>
                   <a:srgbClr val="FFFFFC"/>
                 </a:solidFill>
-                <a:latin typeface="NeuralMind Sans Square"/>
+                <a:latin typeface="Outfit"/>
               </a:rPr>
               <a:t>Jurema</a:t>
             </a:r>
@@ -7553,7 +7553,7 @@
                 <a:solidFill>
                   <a:srgbClr val="FFFFFC"/>
                 </a:solidFill>
-                <a:latin typeface="NeuralMind Sans Square"/>
+                <a:latin typeface="Outfit"/>
               </a:rPr>
               <a:t>LLM jurídico brasileiro para linguagem, doutrina e contexto normativo local.</a:t>
             </a:r>
@@ -7639,7 +7639,7 @@
                 <a:solidFill>
                   <a:srgbClr val="9381FF"/>
                 </a:solidFill>
-                <a:latin typeface="NeuralMind Sans Square"/>
+                <a:latin typeface="Outfit"/>
               </a:rPr>
               <a:t>CAMADA OPERACIONAL</a:t>
             </a:r>
@@ -7678,7 +7678,7 @@
                 <a:solidFill>
                   <a:srgbClr val="FFFFFC"/>
                 </a:solidFill>
-                <a:latin typeface="NeuralMind Sans Square"/>
+                <a:latin typeface="Outfit"/>
               </a:rPr>
               <a:t>Agentes &amp; Workflow</a:t>
             </a:r>
@@ -7717,7 +7717,7 @@
                 <a:solidFill>
                   <a:srgbClr val="FFFFFC"/>
                 </a:solidFill>
-                <a:latin typeface="NeuralMind Sans Square"/>
+                <a:latin typeface="Outfit"/>
               </a:rPr>
               <a:t>Orquestra tarefas, validações e próximos passos sob supervisão humana.</a:t>
             </a:r>
@@ -7817,7 +7817,7 @@
                 <a:solidFill>
                   <a:srgbClr val="9381FF"/>
                 </a:solidFill>
-                <a:latin typeface="NeuralMind Sans Square"/>
+                <a:latin typeface="Outfit"/>
               </a:rPr>
               <a:t>CAPÍTULO 02</a:t>
             </a:r>
@@ -7856,7 +7856,7 @@
                 <a:solidFill>
                   <a:srgbClr val="FFFFFC"/>
                 </a:solidFill>
-                <a:latin typeface="NeuralMind Sans Square"/>
+                <a:latin typeface="Outfit"/>
               </a:rPr>
               <a:t>Arquitetura de
 Produtos</a:t>
@@ -7896,7 +7896,7 @@
                 <a:solidFill>
                   <a:srgbClr val="FFFFFC"/>
                 </a:solidFill>
-                <a:latin typeface="NeuralMind Sans Square"/>
+                <a:latin typeface="Outfit"/>
               </a:rPr>
               <a:t>Três verticais, um único compromisso: IA responsável para decisões em ambientes regulados.</a:t>
             </a:r>
@@ -7920,7 +7920,7 @@
         <p:spPr>
           <a:xfrm>
             <a:off x="11109960" y="6236208"/>
-            <a:ext cx="658368" cy="274663"/>
+            <a:ext cx="658368" cy="504374"/>
           </a:xfrm>
           <a:prstGeom prst="rect">
             <a:avLst/>
@@ -8020,7 +8020,7 @@
                 <a:solidFill>
                   <a:srgbClr val="F2766B"/>
                 </a:solidFill>
-                <a:latin typeface="NeuralMind Sans Square"/>
+                <a:latin typeface="Outfit"/>
               </a:rPr>
               <a:t>VERTICAIS DE ATUAÇÃO</a:t>
             </a:r>
@@ -8059,7 +8059,7 @@
                 <a:solidFill>
                   <a:srgbClr val="FFFFFC"/>
                 </a:solidFill>
-                <a:latin typeface="NeuralMind Sans Square"/>
+                <a:latin typeface="Outfit"/>
               </a:rPr>
               <a:t>IA responsável para setores
 onde precisão não é opcional.</a:t>
@@ -8099,7 +8099,7 @@
                 <a:solidFill>
                   <a:srgbClr val="FFFFFC"/>
                 </a:solidFill>
-                <a:latin typeface="NeuralMind Sans Square"/>
+                <a:latin typeface="Outfit"/>
               </a:rPr>
               <a:t>Cada vertical resolve um tipo distinto de problema crítico, sempre com fonte verificável, rastreabilidade e supervisão humana no centro da decisão.</a:t>
             </a:r>
@@ -8185,7 +8185,7 @@
                 <a:solidFill>
                   <a:srgbClr val="F2766B"/>
                 </a:solidFill>
-                <a:latin typeface="NeuralMind Sans Square"/>
+                <a:latin typeface="Outfit"/>
               </a:rPr>
               <a:t>01</a:t>
             </a:r>
@@ -8224,7 +8224,7 @@
                 <a:solidFill>
                   <a:srgbClr val="FFFFFC"/>
                 </a:solidFill>
-                <a:latin typeface="NeuralMind Sans Square"/>
+                <a:latin typeface="Outfit"/>
               </a:rPr>
               <a:t>Dados &amp; Conhecimento</a:t>
             </a:r>
@@ -8263,7 +8263,7 @@
                 <a:solidFill>
                   <a:srgbClr val="FFFFFC"/>
                 </a:solidFill>
-                <a:latin typeface="NeuralMind Sans Square"/>
+                <a:latin typeface="Outfit"/>
               </a:rPr>
               <a:t>Transforma documentos, bases internas e informação não estruturada em respostas, evidências e insights verificáveis.</a:t>
             </a:r>
@@ -8345,7 +8345,7 @@
                 <a:solidFill>
                   <a:srgbClr val="9381FF"/>
                 </a:solidFill>
-                <a:latin typeface="NeuralMind Sans Square"/>
+                <a:latin typeface="Outfit"/>
               </a:rPr>
               <a:t>NeuralSearchX   NDocs   Tuss-Finder</a:t>
             </a:r>
@@ -8431,7 +8431,7 @@
                 <a:solidFill>
                   <a:srgbClr val="F2766B"/>
                 </a:solidFill>
-                <a:latin typeface="NeuralMind Sans Square"/>
+                <a:latin typeface="Outfit"/>
               </a:rPr>
               <a:t>02</a:t>
             </a:r>
@@ -8470,7 +8470,7 @@
                 <a:solidFill>
                   <a:srgbClr val="FFFFFC"/>
                 </a:solidFill>
-                <a:latin typeface="NeuralMind Sans Square"/>
+                <a:latin typeface="Outfit"/>
               </a:rPr>
               <a:t>Jurídico</a:t>
             </a:r>
@@ -8509,7 +8509,7 @@
                 <a:solidFill>
                   <a:srgbClr val="FFFFFC"/>
                 </a:solidFill>
-                <a:latin typeface="NeuralMind Sans Square"/>
+                <a:latin typeface="Outfit"/>
               </a:rPr>
               <a:t>Modelos e aplicações especializados no contexto brasileiro para apoiar análise, fundamentação e produção jurídica.</a:t>
             </a:r>
@@ -8591,7 +8591,7 @@
                 <a:solidFill>
                   <a:srgbClr val="9381FF"/>
                 </a:solidFill>
-                <a:latin typeface="NeuralMind Sans Square"/>
+                <a:latin typeface="Outfit"/>
               </a:rPr>
               <a:t>Jurema   ARACI   AssertIA   SofIA</a:t>
             </a:r>
@@ -8677,7 +8677,7 @@
                 <a:solidFill>
                   <a:srgbClr val="F2766B"/>
                 </a:solidFill>
-                <a:latin typeface="NeuralMind Sans Square"/>
+                <a:latin typeface="Outfit"/>
               </a:rPr>
               <a:t>03</a:t>
             </a:r>
@@ -8716,7 +8716,7 @@
                 <a:solidFill>
                   <a:srgbClr val="FFFFFC"/>
                 </a:solidFill>
-                <a:latin typeface="NeuralMind Sans Square"/>
+                <a:latin typeface="Outfit"/>
               </a:rPr>
               <a:t>Saúde</a:t>
             </a:r>
@@ -8755,7 +8755,7 @@
                 <a:solidFill>
                   <a:srgbClr val="FFFFFC"/>
                 </a:solidFill>
-                <a:latin typeface="NeuralMind Sans Square"/>
+                <a:latin typeface="Outfit"/>
               </a:rPr>
               <a:t>Soluções para priorização, classificação e apoio operacional em ambientes clínicos, regulatórios e assistenciais.</a:t>
             </a:r>
@@ -8837,7 +8837,7 @@
                 <a:solidFill>
                   <a:srgbClr val="9381FF"/>
                 </a:solidFill>
-                <a:latin typeface="NeuralMind Sans Square"/>
+                <a:latin typeface="Outfit"/>
               </a:rPr>
               <a:t>PrioScan</a:t>
             </a:r>
@@ -8937,7 +8937,7 @@
                 <a:solidFill>
                   <a:srgbClr val="290241"/>
                 </a:solidFill>
-                <a:latin typeface="NeuralMind Sans Square"/>
+                <a:latin typeface="Outfit"/>
               </a:rPr>
               <a:t>PRODUTO EXEMPLO</a:t>
             </a:r>
@@ -8976,7 +8976,7 @@
                 <a:solidFill>
                   <a:srgbClr val="290241"/>
                 </a:solidFill>
-                <a:latin typeface="NeuralMind Sans Square"/>
+                <a:latin typeface="Outfit"/>
               </a:rPr>
               <a:t>NeuralSearchX</a:t>
             </a:r>
@@ -9015,7 +9015,7 @@
                 <a:solidFill>
                   <a:srgbClr val="290241"/>
                 </a:solidFill>
-                <a:latin typeface="NeuralMind Sans Square"/>
+                <a:latin typeface="Outfit"/>
               </a:rPr>
               <a:t>IA que responde o que você precisa — com a fonte sempre à vista.</a:t>
             </a:r>
@@ -9054,7 +9054,7 @@
                 <a:solidFill>
                   <a:srgbClr val="6A6570"/>
                 </a:solidFill>
-                <a:latin typeface="NeuralMind Sans Square"/>
+                <a:latin typeface="Outfit"/>
               </a:rPr>
               <a:t>Busca conversacional sobre bases internas de documentos. Cada resposta carrega o trecho original que a fundamenta, permitindo verificação imediata e decisões com lastro.</a:t>
             </a:r>
@@ -9136,7 +9136,7 @@
                 <a:solidFill>
                   <a:srgbClr val="F2766B"/>
                 </a:solidFill>
-                <a:latin typeface="NeuralMind Sans Square"/>
+                <a:latin typeface="Outfit"/>
               </a:rPr>
               <a:t>01</a:t>
             </a:r>
@@ -9175,7 +9175,7 @@
                 <a:solidFill>
                   <a:srgbClr val="0F1108"/>
                 </a:solidFill>
-                <a:latin typeface="NeuralMind Sans Square"/>
+                <a:latin typeface="Outfit"/>
               </a:rPr>
               <a:t>Busca semântica multifonte</a:t>
             </a:r>
@@ -9257,7 +9257,7 @@
                 <a:solidFill>
                   <a:srgbClr val="F2766B"/>
                 </a:solidFill>
-                <a:latin typeface="NeuralMind Sans Square"/>
+                <a:latin typeface="Outfit"/>
               </a:rPr>
               <a:t>02</a:t>
             </a:r>
@@ -9296,7 +9296,7 @@
                 <a:solidFill>
                   <a:srgbClr val="0F1108"/>
                 </a:solidFill>
-                <a:latin typeface="NeuralMind Sans Square"/>
+                <a:latin typeface="Outfit"/>
               </a:rPr>
               <a:t>Citação do trecho original</a:t>
             </a:r>
@@ -9378,7 +9378,7 @@
                 <a:solidFill>
                   <a:srgbClr val="F2766B"/>
                 </a:solidFill>
-                <a:latin typeface="NeuralMind Sans Square"/>
+                <a:latin typeface="Outfit"/>
               </a:rPr>
               <a:t>03</a:t>
             </a:r>
@@ -9417,7 +9417,7 @@
                 <a:solidFill>
                   <a:srgbClr val="0F1108"/>
                 </a:solidFill>
-                <a:latin typeface="NeuralMind Sans Square"/>
+                <a:latin typeface="Outfit"/>
               </a:rPr>
               <a:t>Validação humana no fluxo</a:t>
             </a:r>
@@ -9685,7 +9685,7 @@
                 <a:solidFill>
                   <a:srgbClr val="290241"/>
                 </a:solidFill>
-                <a:latin typeface="NeuralMind Sans Square"/>
+                <a:latin typeface="Outfit"/>
               </a:rPr>
               <a:t>CONSULTA</a:t>
             </a:r>
@@ -9724,7 +9724,7 @@
                 <a:solidFill>
                   <a:srgbClr val="0F1108"/>
                 </a:solidFill>
-                <a:latin typeface="NeuralMind Sans Square"/>
+                <a:latin typeface="Outfit"/>
               </a:rPr>
               <a:t>Quais contratos exigem revisão regulatória?</a:t>
             </a:r>
@@ -9810,7 +9810,7 @@
                 <a:solidFill>
                   <a:srgbClr val="290241"/>
                 </a:solidFill>
-                <a:latin typeface="NeuralMind Sans Square"/>
+                <a:latin typeface="Outfit"/>
               </a:rPr>
               <a:t>RESPOSTA COM FONTE</a:t>
             </a:r>
@@ -9849,7 +9849,7 @@
                 <a:solidFill>
                   <a:srgbClr val="0F1108"/>
                 </a:solidFill>
-                <a:latin typeface="NeuralMind Sans Square"/>
+                <a:latin typeface="Outfit"/>
               </a:rPr>
               <a:t>Foram identificados três documentos com cláusulas de atualização regulatória e prazo de revisão em aberto.</a:t>
             </a:r>
@@ -9935,7 +9935,7 @@
                 <a:solidFill>
                   <a:srgbClr val="F2766B"/>
                 </a:solidFill>
-                <a:latin typeface="NeuralMind Sans Square"/>
+                <a:latin typeface="Outfit"/>
               </a:rPr>
               <a:t>Fonte 01</a:t>
             </a:r>
@@ -9974,7 +9974,7 @@
                 <a:solidFill>
                   <a:srgbClr val="290241"/>
                 </a:solidFill>
-                <a:latin typeface="NeuralMind Sans Square"/>
+                <a:latin typeface="Outfit"/>
               </a:rPr>
               <a:t>Contrato matriz · pág. 14</a:t>
             </a:r>
@@ -10060,7 +10060,7 @@
                 <a:solidFill>
                   <a:srgbClr val="F2766B"/>
                 </a:solidFill>
-                <a:latin typeface="NeuralMind Sans Square"/>
+                <a:latin typeface="Outfit"/>
               </a:rPr>
               <a:t>Fonte 02</a:t>
             </a:r>
@@ -10099,7 +10099,7 @@
                 <a:solidFill>
                   <a:srgbClr val="290241"/>
                 </a:solidFill>
-                <a:latin typeface="NeuralMind Sans Square"/>
+                <a:latin typeface="Outfit"/>
               </a:rPr>
               <a:t>Anexo jurídico · pág. 08</a:t>
             </a:r>
@@ -10123,7 +10123,7 @@
         <p:spPr>
           <a:xfrm>
             <a:off x="11109960" y="6236208"/>
-            <a:ext cx="658368" cy="274663"/>
+            <a:ext cx="658368" cy="504374"/>
           </a:xfrm>
           <a:prstGeom prst="rect">
             <a:avLst/>
@@ -10223,7 +10223,7 @@
                 <a:solidFill>
                   <a:srgbClr val="290241"/>
                 </a:solidFill>
-                <a:latin typeface="NeuralMind Sans Square"/>
+                <a:latin typeface="Outfit"/>
               </a:rPr>
               <a:t>A IA gera, organiza, sugere e acelera.
 O humano valida, decide e assume o controle.</a:t>
@@ -10263,7 +10263,7 @@
                 <a:solidFill>
                   <a:srgbClr val="F2766B"/>
                 </a:solidFill>
-                <a:latin typeface="NeuralMind Sans Square"/>
+                <a:latin typeface="Outfit"/>
               </a:rPr>
               <a:t>MANIFESTO NEURALMIND.AI</a:t>
             </a:r>
@@ -10287,7 +10287,7 @@
         <p:spPr>
           <a:xfrm>
             <a:off x="11109960" y="6236208"/>
-            <a:ext cx="658368" cy="274663"/>
+            <a:ext cx="658368" cy="504374"/>
           </a:xfrm>
           <a:prstGeom prst="rect">
             <a:avLst/>
@@ -10387,7 +10387,7 @@
                 <a:solidFill>
                   <a:srgbClr val="290241"/>
                 </a:solidFill>
-                <a:latin typeface="NeuralMind Sans Square"/>
+                <a:latin typeface="Outfit"/>
               </a:rPr>
               <a:t>POSICIONAMENTO</a:t>
             </a:r>
@@ -10426,7 +10426,7 @@
                 <a:solidFill>
                   <a:srgbClr val="290241"/>
                 </a:solidFill>
-                <a:latin typeface="NeuralMind Sans Square"/>
+                <a:latin typeface="Outfit"/>
               </a:rPr>
               <a:t>Inteligência artificial
 com rastreabilidade.</a:t>
@@ -10509,7 +10509,7 @@
                 <a:solidFill>
                   <a:srgbClr val="F2766B"/>
                 </a:solidFill>
-                <a:latin typeface="NeuralMind Sans Square"/>
+                <a:latin typeface="Outfit"/>
               </a:rPr>
               <a:t>01</a:t>
             </a:r>
@@ -10548,7 +10548,7 @@
                 <a:solidFill>
                   <a:srgbClr val="0F1108"/>
                 </a:solidFill>
-                <a:latin typeface="NeuralMind Sans Square"/>
+                <a:latin typeface="Outfit"/>
               </a:rPr>
               <a:t>Cada resposta carrega o trecho exato que a fundamenta.</a:t>
             </a:r>
@@ -10630,7 +10630,7 @@
                 <a:solidFill>
                   <a:srgbClr val="F2766B"/>
                 </a:solidFill>
-                <a:latin typeface="NeuralMind Sans Square"/>
+                <a:latin typeface="Outfit"/>
               </a:rPr>
               <a:t>02</a:t>
             </a:r>
@@ -10669,7 +10669,7 @@
                 <a:solidFill>
                   <a:srgbClr val="0F1108"/>
                 </a:solidFill>
-                <a:latin typeface="NeuralMind Sans Square"/>
+                <a:latin typeface="Outfit"/>
               </a:rPr>
               <a:t>Modelos especializados em domínio — não generalistas.</a:t>
             </a:r>
@@ -10751,7 +10751,7 @@
                 <a:solidFill>
                   <a:srgbClr val="F2766B"/>
                 </a:solidFill>
-                <a:latin typeface="NeuralMind Sans Square"/>
+                <a:latin typeface="Outfit"/>
               </a:rPr>
               <a:t>03</a:t>
             </a:r>
@@ -10790,7 +10790,7 @@
                 <a:solidFill>
                   <a:srgbClr val="0F1108"/>
                 </a:solidFill>
-                <a:latin typeface="NeuralMind Sans Square"/>
+                <a:latin typeface="Outfit"/>
               </a:rPr>
               <a:t>Operação auditável e em conformidade com a LGPD.</a:t>
             </a:r>
@@ -10814,7 +10814,7 @@
         <p:spPr>
           <a:xfrm>
             <a:off x="11109960" y="6236208"/>
-            <a:ext cx="658368" cy="274663"/>
+            <a:ext cx="658368" cy="504374"/>
           </a:xfrm>
           <a:prstGeom prst="rect">
             <a:avLst/>
@@ -10914,7 +10914,7 @@
                 <a:solidFill>
                   <a:srgbClr val="F2766B"/>
                 </a:solidFill>
-                <a:latin typeface="NeuralMind Sans Square"/>
+                <a:latin typeface="Outfit"/>
               </a:rPr>
               <a:t>RESULTADO · NEURALSEARCHX 2.0</a:t>
             </a:r>
@@ -10949,7 +10949,7 @@
                 <a:solidFill>
                   <a:srgbClr val="FFFFFC"/>
                 </a:solidFill>
-                <a:latin typeface="NeuralMind Sans Square"/>
+                <a:latin typeface="Outfit"/>
               </a:rPr>
               <a:t>4</a:t>
             </a:r>
@@ -10958,7 +10958,7 @@
                 <a:solidFill>
                   <a:srgbClr val="F2766B"/>
                 </a:solidFill>
-                <a:latin typeface="NeuralMind Sans Square"/>
+                <a:latin typeface="Outfit"/>
               </a:rPr>
               <a:t>×</a:t>
             </a:r>
@@ -10997,7 +10997,7 @@
                 <a:solidFill>
                   <a:srgbClr val="FFFFFC"/>
                 </a:solidFill>
-                <a:latin typeface="NeuralMind Sans Square"/>
+                <a:latin typeface="Outfit"/>
               </a:rPr>
               <a:t>Redução de latência da busca semântica multifonte na nova arquitetura, sem perda de citação ou rastreabilidade.</a:t>
             </a:r>
@@ -11021,7 +11021,7 @@
         <p:spPr>
           <a:xfrm>
             <a:off x="11109960" y="6236208"/>
-            <a:ext cx="658368" cy="274663"/>
+            <a:ext cx="658368" cy="504374"/>
           </a:xfrm>
           <a:prstGeom prst="rect">
             <a:avLst/>
@@ -11121,7 +11121,7 @@
                 <a:solidFill>
                   <a:srgbClr val="290241"/>
                 </a:solidFill>
-                <a:latin typeface="NeuralMind Sans Square"/>
+                <a:latin typeface="Outfit"/>
               </a:rPr>
               <a:t>FLUXO DE TRABALHO</a:t>
             </a:r>
@@ -11160,7 +11160,7 @@
                 <a:solidFill>
                   <a:srgbClr val="290241"/>
                 </a:solidFill>
-                <a:latin typeface="NeuralMind Sans Square"/>
+                <a:latin typeface="Outfit"/>
               </a:rPr>
               <a:t>Da pergunta à decisão auditável.</a:t>
             </a:r>
@@ -11287,7 +11287,7 @@
                 <a:solidFill>
                   <a:srgbClr val="FFFFFC"/>
                 </a:solidFill>
-                <a:latin typeface="NeuralMind Sans Square"/>
+                <a:latin typeface="Outfit"/>
               </a:rPr>
               <a:t>01</a:t>
             </a:r>
@@ -11326,7 +11326,7 @@
                 <a:solidFill>
                   <a:srgbClr val="290241"/>
                 </a:solidFill>
-                <a:latin typeface="NeuralMind Sans Square"/>
+                <a:latin typeface="Outfit"/>
               </a:rPr>
               <a:t>Pergunta natural</a:t>
             </a:r>
@@ -11365,7 +11365,7 @@
                 <a:solidFill>
                   <a:srgbClr val="6A6570"/>
                 </a:solidFill>
-                <a:latin typeface="NeuralMind Sans Square"/>
+                <a:latin typeface="Outfit"/>
               </a:rPr>
               <a:t>O usuário descreve a necessidade em linguagem comum.</a:t>
             </a:r>
@@ -11449,7 +11449,7 @@
                 <a:solidFill>
                   <a:srgbClr val="FFFFFC"/>
                 </a:solidFill>
-                <a:latin typeface="NeuralMind Sans Square"/>
+                <a:latin typeface="Outfit"/>
               </a:rPr>
               <a:t>02</a:t>
             </a:r>
@@ -11488,7 +11488,7 @@
                 <a:solidFill>
                   <a:srgbClr val="290241"/>
                 </a:solidFill>
-                <a:latin typeface="NeuralMind Sans Square"/>
+                <a:latin typeface="Outfit"/>
               </a:rPr>
               <a:t>Busca semântica</a:t>
             </a:r>
@@ -11527,7 +11527,7 @@
                 <a:solidFill>
                   <a:srgbClr val="6A6570"/>
                 </a:solidFill>
-                <a:latin typeface="NeuralMind Sans Square"/>
+                <a:latin typeface="Outfit"/>
               </a:rPr>
               <a:t>Recuperação em múltiplas fontes com citação do trecho exato.</a:t>
             </a:r>
@@ -11611,7 +11611,7 @@
                 <a:solidFill>
                   <a:srgbClr val="FFFFFC"/>
                 </a:solidFill>
-                <a:latin typeface="NeuralMind Sans Square"/>
+                <a:latin typeface="Outfit"/>
               </a:rPr>
               <a:t>03</a:t>
             </a:r>
@@ -11650,7 +11650,7 @@
                 <a:solidFill>
                   <a:srgbClr val="290241"/>
                 </a:solidFill>
-                <a:latin typeface="NeuralMind Sans Square"/>
+                <a:latin typeface="Outfit"/>
               </a:rPr>
               <a:t>Síntese contextual</a:t>
             </a:r>
@@ -11689,7 +11689,7 @@
                 <a:solidFill>
                   <a:srgbClr val="6A6570"/>
                 </a:solidFill>
-                <a:latin typeface="NeuralMind Sans Square"/>
+                <a:latin typeface="Outfit"/>
               </a:rPr>
               <a:t>Resposta consolidada, vinculada a cada referência.</a:t>
             </a:r>
@@ -11773,7 +11773,7 @@
                 <a:solidFill>
                   <a:srgbClr val="FFFFFC"/>
                 </a:solidFill>
-                <a:latin typeface="NeuralMind Sans Square"/>
+                <a:latin typeface="Outfit"/>
               </a:rPr>
               <a:t>04</a:t>
             </a:r>
@@ -11812,7 +11812,7 @@
                 <a:solidFill>
                   <a:srgbClr val="290241"/>
                 </a:solidFill>
-                <a:latin typeface="NeuralMind Sans Square"/>
+                <a:latin typeface="Outfit"/>
               </a:rPr>
               <a:t>Validação humana</a:t>
             </a:r>
@@ -11851,7 +11851,7 @@
                 <a:solidFill>
                   <a:srgbClr val="6A6570"/>
                 </a:solidFill>
-                <a:latin typeface="NeuralMind Sans Square"/>
+                <a:latin typeface="Outfit"/>
               </a:rPr>
               <a:t>O especialista revisa, decide e assume o controle.</a:t>
             </a:r>
@@ -11875,7 +11875,7 @@
         <p:spPr>
           <a:xfrm>
             <a:off x="11109960" y="6236208"/>
-            <a:ext cx="658368" cy="274663"/>
+            <a:ext cx="658368" cy="504374"/>
           </a:xfrm>
           <a:prstGeom prst="rect">
             <a:avLst/>
@@ -11975,7 +11975,7 @@
                 <a:solidFill>
                   <a:srgbClr val="F2766B"/>
                 </a:solidFill>
-                <a:latin typeface="NeuralMind Sans Square"/>
+                <a:latin typeface="Outfit"/>
               </a:rPr>
               <a:t>PRÓXIMO PASSO</a:t>
             </a:r>
@@ -12014,7 +12014,7 @@
                 <a:solidFill>
                   <a:srgbClr val="FFFFFC"/>
                 </a:solidFill>
-                <a:latin typeface="NeuralMind Sans Square"/>
+                <a:latin typeface="Outfit"/>
               </a:rPr>
               <a:t>Vamos construir
 juntos.</a:t>
@@ -12039,7 +12039,7 @@
         <p:spPr>
           <a:xfrm>
             <a:off x="868680" y="5138928"/>
-            <a:ext cx="2880360" cy="271827"/>
+            <a:ext cx="2880360" cy="618736"/>
           </a:xfrm>
           <a:prstGeom prst="rect">
             <a:avLst/>
@@ -12078,7 +12078,7 @@
                 <a:solidFill>
                   <a:srgbClr val="9381FF"/>
                 </a:solidFill>
-                <a:latin typeface="NeuralMind Sans Square"/>
+                <a:latin typeface="Outfit"/>
               </a:rPr>
               <a:t>COMERCIAL</a:t>
             </a:r>
@@ -12117,7 +12117,7 @@
                 <a:solidFill>
                   <a:srgbClr val="FFFFFC"/>
                 </a:solidFill>
-                <a:latin typeface="NeuralMind Sans Square"/>
+                <a:latin typeface="Outfit"/>
               </a:rPr>
               <a:t>contato@neuralmind.ai</a:t>
             </a:r>
@@ -12156,7 +12156,7 @@
                 <a:solidFill>
                   <a:srgbClr val="9381FF"/>
                 </a:solidFill>
-                <a:latin typeface="NeuralMind Sans Square"/>
+                <a:latin typeface="Outfit"/>
               </a:rPr>
               <a:t>WEB</a:t>
             </a:r>
@@ -12195,7 +12195,7 @@
                 <a:solidFill>
                   <a:srgbClr val="FFFFFC"/>
                 </a:solidFill>
-                <a:latin typeface="NeuralMind Sans Square"/>
+                <a:latin typeface="Outfit"/>
               </a:rPr>
               <a:t>neuralmind.ai</a:t>
             </a:r>
@@ -12234,7 +12234,7 @@
                 <a:solidFill>
                   <a:srgbClr val="9381FF"/>
                 </a:solidFill>
-                <a:latin typeface="NeuralMind Sans Square"/>
+                <a:latin typeface="Outfit"/>
               </a:rPr>
               <a:t>LINKEDIN</a:t>
             </a:r>
@@ -12273,7 +12273,7 @@
                 <a:solidFill>
                   <a:srgbClr val="FFFFFC"/>
                 </a:solidFill>
-                <a:latin typeface="NeuralMind Sans Square"/>
+                <a:latin typeface="Outfit"/>
               </a:rPr>
               <a:t>@neuralmind.ai</a:t>
             </a:r>
